--- a/curso/pptx/S01.pptx
+++ b/curso/pptx/S01.pptx
@@ -3748,8 +3748,8 @@
         </p:nvSpPr>
         <p:spPr>
           <a:xfrm>
-            <a:off x="640000" y="420000"/>
-            <a:ext cx="10912000" cy="420000"/>
+            <a:off x="10652000" y="380000"/>
+            <a:ext cx="900000" cy="800000"/>
           </a:xfrm>
           <a:prstGeom prst="rect">
             <a:avLst/>
@@ -3764,17 +3764,17 @@
           <a:p>
             <a:pPr>
               <a:spcAft>
-                <a:spcPts val="810"/>
+                <a:spcPts val="1980"/>
               </a:spcAft>
             </a:pPr>
             <a:r>
-              <a:rPr sz="1800" b="1">
+              <a:rPr sz="4400" b="0">
                 <a:solidFill>
                   <a:srgbClr val="1F2A44"/>
                 </a:solidFill>
                 <a:latin typeface="Nunito Sans"/>
               </a:rPr>
-              <a:t>🦉 Aula de Filosofía</a:t>
+              <a:t>🙃</a:t>
             </a:r>
           </a:p>
         </p:txBody>

--- a/curso/pptx/S01.pptx
+++ b/curso/pptx/S01.pptx
@@ -469,286 +469,6 @@
     </a:lvl9pPr>
   </p:notesStyle>
 </p:notesMaster>
-</file>
-
-<file path=ppt/notesSlides/notesSlide1.xml><?xml version="1.0" encoding="utf-8"?>
-<p:notes xmlns:a="http://schemas.openxmlformats.org/drawingml/2006/main" xmlns:p="http://schemas.openxmlformats.org/presentationml/2006/main" xmlns:r="http://schemas.openxmlformats.org/officeDocument/2006/relationships">
-  <p:cSld>
-    <p:spTree>
-      <p:nvGrpSpPr>
-        <p:cNvPr id="1" name=""/>
-        <p:cNvGrpSpPr/>
-        <p:nvPr/>
-      </p:nvGrpSpPr>
-      <p:grpSpPr>
-        <a:xfrm>
-          <a:off x="0" y="0"/>
-          <a:ext cx="0" cy="0"/>
-          <a:chOff x="0" y="0"/>
-          <a:chExt cx="0" cy="0"/>
-        </a:xfrm>
-      </p:grpSpPr>
-      <p:sp>
-        <p:nvSpPr>
-          <p:cNvPr id="2" name="Slide Image Placeholder 1"/>
-          <p:cNvSpPr>
-            <a:spLocks noGrp="1"/>
-          </p:cNvSpPr>
-          <p:nvPr>
-            <p:ph type="sldImg" idx="2"/>
-          </p:nvPr>
-        </p:nvSpPr>
-        <p:spPr/>
-      </p:sp>
-      <p:sp>
-        <p:nvSpPr>
-          <p:cNvPr id="3" name="Notes Placeholder 2"/>
-          <p:cNvSpPr>
-            <a:spLocks noGrp="1"/>
-          </p:cNvSpPr>
-          <p:nvPr>
-            <p:ph type="body" idx="3" sz="quarter"/>
-          </p:nvPr>
-        </p:nvSpPr>
-        <p:spPr/>
-        <p:txBody>
-          <a:bodyPr/>
-          <a:lstStyle/>
-          <a:p>
-            <a:r>
-              <a:t>Nadie tiene que contestar: solo pensarlo.</a:t>
-            </a:r>
-          </a:p>
-        </p:txBody>
-      </p:sp>
-      <p:sp>
-        <p:nvSpPr>
-          <p:cNvPr id="4" name="Slide Number Placeholder 3"/>
-          <p:cNvSpPr>
-            <a:spLocks noGrp="1"/>
-          </p:cNvSpPr>
-          <p:nvPr>
-            <p:ph type="sldNum" idx="5" sz="quarter"/>
-          </p:nvPr>
-        </p:nvSpPr>
-        <p:spPr/>
-      </p:sp>
-    </p:spTree>
-  </p:cSld>
-  <p:clrMapOvr>
-    <a:masterClrMapping/>
-  </p:clrMapOvr>
-</p:notes>
-</file>
-
-<file path=ppt/notesSlides/notesSlide2.xml><?xml version="1.0" encoding="utf-8"?>
-<p:notes xmlns:a="http://schemas.openxmlformats.org/drawingml/2006/main" xmlns:p="http://schemas.openxmlformats.org/presentationml/2006/main" xmlns:r="http://schemas.openxmlformats.org/officeDocument/2006/relationships">
-  <p:cSld>
-    <p:spTree>
-      <p:nvGrpSpPr>
-        <p:cNvPr id="1" name=""/>
-        <p:cNvGrpSpPr/>
-        <p:nvPr/>
-      </p:nvGrpSpPr>
-      <p:grpSpPr>
-        <a:xfrm>
-          <a:off x="0" y="0"/>
-          <a:ext cx="0" cy="0"/>
-          <a:chOff x="0" y="0"/>
-          <a:chExt cx="0" cy="0"/>
-        </a:xfrm>
-      </p:grpSpPr>
-      <p:sp>
-        <p:nvSpPr>
-          <p:cNvPr id="2" name="Slide Image Placeholder 1"/>
-          <p:cNvSpPr>
-            <a:spLocks noGrp="1"/>
-          </p:cNvSpPr>
-          <p:nvPr>
-            <p:ph type="sldImg" idx="2"/>
-          </p:nvPr>
-        </p:nvSpPr>
-        <p:spPr/>
-      </p:sp>
-      <p:sp>
-        <p:nvSpPr>
-          <p:cNvPr id="3" name="Notes Placeholder 2"/>
-          <p:cNvSpPr>
-            <a:spLocks noGrp="1"/>
-          </p:cNvSpPr>
-          <p:nvPr>
-            <p:ph type="body" idx="3" sz="quarter"/>
-          </p:nvPr>
-        </p:nvSpPr>
-        <p:spPr/>
-        <p:txBody>
-          <a:bodyPr/>
-          <a:lstStyle/>
-          <a:p>
-            <a:r>
-              <a:t>Dejar unos segundos para que piensen la respuesta fácil antes de enseñar los pasos.</a:t>
-            </a:r>
-          </a:p>
-        </p:txBody>
-      </p:sp>
-      <p:sp>
-        <p:nvSpPr>
-          <p:cNvPr id="4" name="Slide Number Placeholder 3"/>
-          <p:cNvSpPr>
-            <a:spLocks noGrp="1"/>
-          </p:cNvSpPr>
-          <p:nvPr>
-            <p:ph type="sldNum" idx="5" sz="quarter"/>
-          </p:nvPr>
-        </p:nvSpPr>
-        <p:spPr/>
-      </p:sp>
-    </p:spTree>
-  </p:cSld>
-  <p:clrMapOvr>
-    <a:masterClrMapping/>
-  </p:clrMapOvr>
-</p:notes>
-</file>
-
-<file path=ppt/notesSlides/notesSlide3.xml><?xml version="1.0" encoding="utf-8"?>
-<p:notes xmlns:a="http://schemas.openxmlformats.org/drawingml/2006/main" xmlns:p="http://schemas.openxmlformats.org/presentationml/2006/main" xmlns:r="http://schemas.openxmlformats.org/officeDocument/2006/relationships">
-  <p:cSld>
-    <p:spTree>
-      <p:nvGrpSpPr>
-        <p:cNvPr id="1" name=""/>
-        <p:cNvGrpSpPr/>
-        <p:nvPr/>
-      </p:nvGrpSpPr>
-      <p:grpSpPr>
-        <a:xfrm>
-          <a:off x="0" y="0"/>
-          <a:ext cx="0" cy="0"/>
-          <a:chOff x="0" y="0"/>
-          <a:chExt cx="0" cy="0"/>
-        </a:xfrm>
-      </p:grpSpPr>
-      <p:sp>
-        <p:nvSpPr>
-          <p:cNvPr id="2" name="Slide Image Placeholder 1"/>
-          <p:cNvSpPr>
-            <a:spLocks noGrp="1"/>
-          </p:cNvSpPr>
-          <p:nvPr>
-            <p:ph type="sldImg" idx="2"/>
-          </p:nvPr>
-        </p:nvSpPr>
-        <p:spPr/>
-      </p:sp>
-      <p:sp>
-        <p:nvSpPr>
-          <p:cNvPr id="3" name="Notes Placeholder 2"/>
-          <p:cNvSpPr>
-            <a:spLocks noGrp="1"/>
-          </p:cNvSpPr>
-          <p:nvPr>
-            <p:ph type="body" idx="3" sz="quarter"/>
-          </p:nvPr>
-        </p:nvSpPr>
-        <p:spPr/>
-        <p:txBody>
-          <a:bodyPr/>
-          <a:lstStyle/>
-          <a:p>
-            <a:r>
-              <a:t>Dejar 2 minutos para que lo escriban. La diapositiva siguiente muestra el resumen.</a:t>
-            </a:r>
-          </a:p>
-        </p:txBody>
-      </p:sp>
-      <p:sp>
-        <p:nvSpPr>
-          <p:cNvPr id="4" name="Slide Number Placeholder 3"/>
-          <p:cNvSpPr>
-            <a:spLocks noGrp="1"/>
-          </p:cNvSpPr>
-          <p:nvPr>
-            <p:ph type="sldNum" idx="5" sz="quarter"/>
-          </p:nvPr>
-        </p:nvSpPr>
-        <p:spPr/>
-      </p:sp>
-    </p:spTree>
-  </p:cSld>
-  <p:clrMapOvr>
-    <a:masterClrMapping/>
-  </p:clrMapOvr>
-</p:notes>
-</file>
-
-<file path=ppt/notesSlides/notesSlide4.xml><?xml version="1.0" encoding="utf-8"?>
-<p:notes xmlns:a="http://schemas.openxmlformats.org/drawingml/2006/main" xmlns:p="http://schemas.openxmlformats.org/presentationml/2006/main" xmlns:r="http://schemas.openxmlformats.org/officeDocument/2006/relationships">
-  <p:cSld>
-    <p:spTree>
-      <p:nvGrpSpPr>
-        <p:cNvPr id="1" name=""/>
-        <p:cNvGrpSpPr/>
-        <p:nvPr/>
-      </p:nvGrpSpPr>
-      <p:grpSpPr>
-        <a:xfrm>
-          <a:off x="0" y="0"/>
-          <a:ext cx="0" cy="0"/>
-          <a:chOff x="0" y="0"/>
-          <a:chExt cx="0" cy="0"/>
-        </a:xfrm>
-      </p:grpSpPr>
-      <p:sp>
-        <p:nvSpPr>
-          <p:cNvPr id="2" name="Slide Image Placeholder 1"/>
-          <p:cNvSpPr>
-            <a:spLocks noGrp="1"/>
-          </p:cNvSpPr>
-          <p:nvPr>
-            <p:ph type="sldImg" idx="2"/>
-          </p:nvPr>
-        </p:nvSpPr>
-        <p:spPr/>
-      </p:sp>
-      <p:sp>
-        <p:nvSpPr>
-          <p:cNvPr id="3" name="Notes Placeholder 2"/>
-          <p:cNvSpPr>
-            <a:spLocks noGrp="1"/>
-          </p:cNvSpPr>
-          <p:nvPr>
-            <p:ph type="body" idx="3" sz="quarter"/>
-          </p:nvPr>
-        </p:nvSpPr>
-        <p:spPr/>
-        <p:txBody>
-          <a:bodyPr/>
-          <a:lstStyle/>
-          <a:p>
-            <a:r>
-              <a:t>Buscar: «pensamiento crítico qué es» · «TED-Ed pensamiento crítico español»</a:t>
-            </a:r>
-          </a:p>
-        </p:txBody>
-      </p:sp>
-      <p:sp>
-        <p:nvSpPr>
-          <p:cNvPr id="4" name="Slide Number Placeholder 3"/>
-          <p:cNvSpPr>
-            <a:spLocks noGrp="1"/>
-          </p:cNvSpPr>
-          <p:nvPr>
-            <p:ph type="sldNum" idx="5" sz="quarter"/>
-          </p:nvPr>
-        </p:nvSpPr>
-        <p:spPr/>
-      </p:sp>
-    </p:spTree>
-  </p:cSld>
-  <p:clrMapOvr>
-    <a:masterClrMapping/>
-  </p:clrMapOvr>
-</p:notes>
 </file>
 
 <file path=ppt/slideLayouts/slideLayout1.xml><?xml version="1.0" encoding="utf-8"?>

--- a/curso/pptx/S01.pptx
+++ b/curso/pptx/S01.pptx
@@ -4106,7 +4106,7 @@
                 </a:solidFill>
                 <a:latin typeface="Nunito Sans"/>
               </a:rPr>
-              <a:t>Aitor presume: «Yo pienso críticamente: a los profes siempre les llevo la contraria».</a:t>
+              <a:t>Un chico presume: «Yo pienso críticamente: a los profes siempre les llevo la contraria».</a:t>
             </a:r>
           </a:p>
         </p:txBody>
@@ -7326,7 +7326,7 @@
                 </a:solidFill>
                 <a:latin typeface="Nunito Sans"/>
               </a:rPr>
-              <a:t>Leire dice que el examen de Matemáticas es el jueves: lo apuntó en la agenda cuando lo dijo la profesora.</a:t>
+              <a:t>Una compañera dice que el examen de Matemáticas es el jueves: lo apuntó en la agenda cuando lo dijo la profesora.</a:t>
             </a:r>
           </a:p>
         </p:txBody>

--- a/curso/pptx/S01.pptx
+++ b/curso/pptx/S01.pptx
@@ -3533,7 +3533,7 @@
                 </a:solidFill>
                 <a:latin typeface="Nunito Sans"/>
               </a:rPr>
-              <a:t>PENSAMIENTO CRÍTICO · SESIÓN 1 · UNIDAD 1 · PENSAR, CREER Y SABER</a:t>
+              <a:t>PENSAMIENTO CRÍTICO · SESIÓN 1 · UNIDAD 1 · PENSAR CRÍTICAMENTE</a:t>
             </a:r>
           </a:p>
         </p:txBody>
